--- a/presentation/modify.pptx
+++ b/presentation/modify.pptx
@@ -2,5 +2,5 @@
 <file path=ppt/presentation.xml>
 </file>
 
-<file path=ppt/slides/slide99.xml>
+<file path=ppt/slides/slide111.xml>
 </file>
--- a/presentation/modify.pptx
+++ b/presentation/modify.pptx
@@ -1,6 +1,26 @@
 
-<file path=ppt/presentation.xml>
+<file path=ppt/presentation.xml><?xml version="1.0" encoding="utf-8"?>
+<p:presentation xmlns:p="http://schemas.openxmlformats.org/presentationml/2006/main">
+  <p:sldMasterIdLst/>
+  <p:sldIdLst>
+    <p:sldId xmlns:r="http://schemas.openxmlformats.org/officeDocument/2006/relationships" id="366" r:id="rId1"/>
+  </p:sldIdLst>
+  <p:sldSz cx="9144000" cy="6858000" type="screen4x3"/>
+  <p:notesSz cx="6858000" cy="9144000"/>
+</p:presentation>
 </file>
 
-<file path=ppt/slides/slide111.xml>
+<file path=ppt/slides/slide111.xml><?xml version="1.0" encoding="utf-8"?>
+<p:sld xmlns:p="http://schemas.openxmlformats.org/presentationml/2006/main">
+  <p:cSld>
+    <p:spTree>
+      <p:nvGrpSpPr>
+        <p:cNvPr id="1" name=""/>
+        <p:cNvGrpSpPr/>
+        <p:nvPr/>
+      </p:nvGrpSpPr>
+      <p:grpSpPr/>
+    </p:spTree>
+  </p:cSld>
+</p:sld>
 </file>
--- a/presentation/modify.pptx
+++ b/presentation/modify.pptx
@@ -11,7 +11,7 @@
 </file>
 
 <file path=ppt/slides/slide111.xml><?xml version="1.0" encoding="utf-8"?>
-<p:sld xmlns:p="http://schemas.openxmlformats.org/presentationml/2006/main">
+<p:sld xmlns:p="http://schemas.openxmlformats.org/presentationml/2006/main" xmlns:a="http://schemas.openxmlformats.org/drawingml/2006/main" xmlns:r="http://schemas.openxmlformats.org/officeDocument/2006/relationships" xmlns:c="http://schemas.openxmlformats.org/drawingml/2006/chart">
   <p:cSld>
     <p:spTree>
       <p:nvGrpSpPr>

--- a/presentation/modify.pptx
+++ b/presentation/modify.pptx
@@ -3,14 +3,14 @@
 <p:presentation xmlns:p="http://schemas.openxmlformats.org/presentationml/2006/main">
   <p:sldMasterIdLst/>
   <p:sldIdLst>
-    <p:sldId xmlns:r="http://schemas.openxmlformats.org/officeDocument/2006/relationships" id="366" r:id="rId2"/>
+    <p:sldId xmlns:r="http://schemas.openxmlformats.org/officeDocument/2006/relationships" id="383" r:id="rId2"/>
   </p:sldIdLst>
   <p:sldSz cx="9144000" cy="6858000" type="screen4x3"/>
   <p:notesSz cx="6858000" cy="9144000"/>
 </p:presentation>
 </file>
 
-<file path=ppt/slides/slide111.xml><?xml version="1.0" encoding="utf-8"?>
+<file path=ppt/slides/slide128.xml><?xml version="1.0" encoding="utf-8"?>
 <p:sld xmlns:p="http://schemas.openxmlformats.org/presentationml/2006/main" xmlns:a="http://schemas.openxmlformats.org/drawingml/2006/main" xmlns:r="http://schemas.openxmlformats.org/officeDocument/2006/relationships" xmlns:c="http://schemas.openxmlformats.org/drawingml/2006/chart">
   <p:cSld>
     <p:spTree>
@@ -25,7 +25,7 @@
 </p:sld>
 </file>
 
-<file path=ppt/theme/theme70.xml><?xml version="1.0" encoding="utf-8"?>
+<file path=ppt/theme/theme86.xml><?xml version="1.0" encoding="utf-8"?>
 <a:theme xmlns:a="http://schemas.openxmlformats.org/drawingml/2006/main" name="Office Theme">
   <a:themeElements>
     <a:clrScheme name="Office">

--- a/presentation/modify.pptx
+++ b/presentation/modify.pptx
@@ -3,14 +3,14 @@
 <p:presentation xmlns:p="http://schemas.openxmlformats.org/presentationml/2006/main">
   <p:sldMasterIdLst/>
   <p:sldIdLst>
-    <p:sldId xmlns:r="http://schemas.openxmlformats.org/officeDocument/2006/relationships" id="383" r:id="rId2"/>
+    <p:sldId xmlns:r="http://schemas.openxmlformats.org/officeDocument/2006/relationships" id="389" r:id="rId2"/>
   </p:sldIdLst>
   <p:sldSz cx="9144000" cy="6858000" type="screen4x3"/>
   <p:notesSz cx="6858000" cy="9144000"/>
 </p:presentation>
 </file>
 
-<file path=ppt/slides/slide128.xml><?xml version="1.0" encoding="utf-8"?>
+<file path=ppt/slides/slide134.xml><?xml version="1.0" encoding="utf-8"?>
 <p:sld xmlns:p="http://schemas.openxmlformats.org/presentationml/2006/main" xmlns:a="http://schemas.openxmlformats.org/drawingml/2006/main" xmlns:r="http://schemas.openxmlformats.org/officeDocument/2006/relationships" xmlns:c="http://schemas.openxmlformats.org/drawingml/2006/chart">
   <p:cSld>
     <p:spTree>
@@ -25,7 +25,7 @@
 </p:sld>
 </file>
 
-<file path=ppt/theme/theme86.xml><?xml version="1.0" encoding="utf-8"?>
+<file path=ppt/theme/theme92.xml><?xml version="1.0" encoding="utf-8"?>
 <a:theme xmlns:a="http://schemas.openxmlformats.org/drawingml/2006/main" name="Office Theme">
   <a:themeElements>
     <a:clrScheme name="Office">

--- a/presentation/modify.pptx
+++ b/presentation/modify.pptx
@@ -3,14 +3,14 @@
 <p:presentation xmlns:p="http://schemas.openxmlformats.org/presentationml/2006/main">
   <p:sldMasterIdLst/>
   <p:sldIdLst>
-    <p:sldId xmlns:r="http://schemas.openxmlformats.org/officeDocument/2006/relationships" id="389" r:id="rId2"/>
+    <p:sldId xmlns:r="http://schemas.openxmlformats.org/officeDocument/2006/relationships" id="390" r:id="rId2"/>
   </p:sldIdLst>
   <p:sldSz cx="9144000" cy="6858000" type="screen4x3"/>
   <p:notesSz cx="6858000" cy="9144000"/>
 </p:presentation>
 </file>
 
-<file path=ppt/slides/slide134.xml><?xml version="1.0" encoding="utf-8"?>
+<file path=ppt/slides/slide135.xml><?xml version="1.0" encoding="utf-8"?>
 <p:sld xmlns:p="http://schemas.openxmlformats.org/presentationml/2006/main" xmlns:a="http://schemas.openxmlformats.org/drawingml/2006/main" xmlns:r="http://schemas.openxmlformats.org/officeDocument/2006/relationships" xmlns:c="http://schemas.openxmlformats.org/drawingml/2006/chart">
   <p:cSld>
     <p:spTree>
@@ -25,7 +25,7 @@
 </p:sld>
 </file>
 
-<file path=ppt/theme/theme92.xml><?xml version="1.0" encoding="utf-8"?>
+<file path=ppt/theme/theme94.xml><?xml version="1.0" encoding="utf-8"?>
 <a:theme xmlns:a="http://schemas.openxmlformats.org/drawingml/2006/main" name="Office Theme">
   <a:themeElements>
     <a:clrScheme name="Office">

--- a/presentation/modify.pptx
+++ b/presentation/modify.pptx
@@ -3,14 +3,14 @@
 <p:presentation xmlns:p="http://schemas.openxmlformats.org/presentationml/2006/main">
   <p:sldMasterIdLst/>
   <p:sldIdLst>
-    <p:sldId xmlns:r="http://schemas.openxmlformats.org/officeDocument/2006/relationships" id="390" r:id="rId2"/>
+    <p:sldId xmlns:r="http://schemas.openxmlformats.org/officeDocument/2006/relationships" id="389" r:id="rId2"/>
   </p:sldIdLst>
   <p:sldSz cx="9144000" cy="6858000" type="screen4x3"/>
   <p:notesSz cx="6858000" cy="9144000"/>
 </p:presentation>
 </file>
 
-<file path=ppt/slides/slide135.xml><?xml version="1.0" encoding="utf-8"?>
+<file path=ppt/slides/slide134.xml><?xml version="1.0" encoding="utf-8"?>
 <p:sld xmlns:p="http://schemas.openxmlformats.org/presentationml/2006/main" xmlns:a="http://schemas.openxmlformats.org/drawingml/2006/main" xmlns:r="http://schemas.openxmlformats.org/officeDocument/2006/relationships" xmlns:c="http://schemas.openxmlformats.org/drawingml/2006/chart">
   <p:cSld>
     <p:spTree>
@@ -25,7 +25,7 @@
 </p:sld>
 </file>
 
-<file path=ppt/theme/theme94.xml><?xml version="1.0" encoding="utf-8"?>
+<file path=ppt/theme/theme92.xml><?xml version="1.0" encoding="utf-8"?>
 <a:theme xmlns:a="http://schemas.openxmlformats.org/drawingml/2006/main" name="Office Theme">
   <a:themeElements>
     <a:clrScheme name="Office">
